--- a/public/fun/cards/food/food-18.pptx
+++ b/public/fun/cards/food/food-18.pptx
@@ -3085,7 +3085,7 @@
     <p:bg>
       <p:bgPr>
         <a:solidFill>
-          <a:srgbClr val="314F22"/>
+          <a:srgbClr val="FF8FB8"/>
         </a:solidFill>
         <a:effectLst/>
       </p:bgPr>
@@ -3099,43 +3099,14 @@
       <p:grpSpPr/>
       <p:sp>
         <p:nvSpPr>
-          <p:cNvPr id="2" name="Rectangle 1"/>
-          <p:cNvSpPr/>
+          <p:cNvPr id="2" name="텍스트"/>
+          <p:cNvSpPr txBox="1"/>
           <p:nvPr/>
         </p:nvSpPr>
         <p:spPr>
           <a:xfrm>
-            <a:off x="1944000" y="216000"/>
-            <a:ext cx="10800" cy="1368000"/>
-          </a:xfrm>
-          <a:prstGeom prst="rect">
-            <a:avLst/>
-          </a:prstGeom>
-          <a:solidFill>
-            <a:srgbClr val="8AB375"/>
-          </a:solidFill>
-          <a:ln>
-            <a:noFill/>
-          </a:ln>
-        </p:spPr>
-        <p:txBody>
-          <a:bodyPr rtlCol="0" anchor="ctr"/>
-          <a:lstStyle/>
-          <a:p>
-            <a:pPr algn="ctr"/>
-          </a:p>
-        </p:txBody>
-      </p:sp>
-      <p:sp>
-        <p:nvSpPr>
-          <p:cNvPr id="3" name="텍스트"/>
-          <p:cNvSpPr txBox="1"/>
-          <p:nvPr/>
-        </p:nvSpPr>
-        <p:spPr>
-          <a:xfrm>
-            <a:off x="216000" y="201600"/>
-            <a:ext cx="1584000" cy="100800"/>
+            <a:off x="252000" y="223200"/>
+            <a:ext cx="2016000" cy="133351"/>
           </a:xfrm>
           <a:prstGeom prst="rect">
             <a:avLst/>
@@ -3154,9 +3125,9 @@
               </a:lnSpc>
             </a:pPr>
             <a:r>
-              <a:rPr sz="700" b="1" spc="300">
+              <a:rPr sz="700" b="1" spc="200">
                 <a:solidFill>
-                  <a:srgbClr val="B7C1B2"/>
+                  <a:srgbClr val="46303E"/>
                 </a:solidFill>
                 <a:latin typeface="맑은 고딕"/>
                 <a:ea typeface="맑은 고딕"/>
@@ -3168,170 +3139,14 @@
       </p:sp>
       <p:sp>
         <p:nvSpPr>
-          <p:cNvPr id="4" name="Freeform 3"/>
-          <p:cNvSpPr/>
+          <p:cNvPr id="3" name="텍스트"/>
+          <p:cNvSpPr txBox="1"/>
           <p:nvPr/>
         </p:nvSpPr>
         <p:spPr>
           <a:xfrm>
-            <a:off x="300960" y="540000"/>
-            <a:ext cx="190080" cy="80784"/>
-          </a:xfrm>
-          <a:custGeom>
-            <a:avLst/>
-            <a:gdLst/>
-            <a:ahLst/>
-            <a:cxnLst/>
-            <a:rect l="l" t="t" r="r" b="b"/>
-            <a:pathLst>
-              <a:path w="190080" h="80784">
-                <a:moveTo>
-                  <a:pt x="190080" y="0"/>
-                </a:moveTo>
-                <a:lnTo>
-                  <a:pt x="187697" y="17976"/>
-                </a:lnTo>
-                <a:lnTo>
-                  <a:pt x="180668" y="35051"/>
-                </a:lnTo>
-                <a:lnTo>
-                  <a:pt x="169345" y="50368"/>
-                </a:lnTo>
-                <a:lnTo>
-                  <a:pt x="154296" y="63159"/>
-                </a:lnTo>
-                <a:lnTo>
-                  <a:pt x="136276" y="72784"/>
-                </a:lnTo>
-                <a:lnTo>
-                  <a:pt x="116188" y="78759"/>
-                </a:lnTo>
-                <a:lnTo>
-                  <a:pt x="95040" y="80784"/>
-                </a:lnTo>
-                <a:lnTo>
-                  <a:pt x="73892" y="78759"/>
-                </a:lnTo>
-                <a:lnTo>
-                  <a:pt x="53804" y="72784"/>
-                </a:lnTo>
-                <a:lnTo>
-                  <a:pt x="35784" y="63159"/>
-                </a:lnTo>
-                <a:lnTo>
-                  <a:pt x="20735" y="50368"/>
-                </a:lnTo>
-                <a:lnTo>
-                  <a:pt x="9412" y="35051"/>
-                </a:lnTo>
-                <a:lnTo>
-                  <a:pt x="2383" y="17976"/>
-                </a:lnTo>
-                <a:lnTo>
-                  <a:pt x="0" y="0"/>
-                </a:lnTo>
-                <a:close/>
-              </a:path>
-            </a:pathLst>
-          </a:custGeom>
-          <a:solidFill>
-            <a:srgbClr val="8AB375"/>
-          </a:solidFill>
-          <a:ln>
-            <a:noFill/>
-          </a:ln>
-        </p:spPr>
-        <p:txBody>
-          <a:bodyPr rtlCol="0" anchor="ctr"/>
-          <a:lstStyle/>
-          <a:p>
-            <a:pPr algn="ctr"/>
-          </a:p>
-        </p:txBody>
-      </p:sp>
-      <p:sp>
-        <p:nvSpPr>
-          <p:cNvPr id="5" name="Rounded Rectangle 4"/>
-          <p:cNvSpPr/>
-          <p:nvPr/>
-        </p:nvSpPr>
-        <p:spPr>
-          <a:xfrm>
-            <a:off x="334224" y="618408"/>
-            <a:ext cx="123552" cy="16632"/>
-          </a:xfrm>
-          <a:prstGeom prst="roundRect">
-            <a:avLst>
-              <a:gd name="adj" fmla="val 42857"/>
-            </a:avLst>
-          </a:prstGeom>
-          <a:solidFill>
-            <a:srgbClr val="526B45"/>
-          </a:solidFill>
-          <a:ln>
-            <a:noFill/>
-          </a:ln>
-        </p:spPr>
-        <p:txBody>
-          <a:bodyPr rtlCol="0" anchor="ctr"/>
-          <a:lstStyle/>
-          <a:p>
-            <a:pPr algn="ctr"/>
-          </a:p>
-        </p:txBody>
-      </p:sp>
-      <p:cxnSp>
-        <p:nvCxnSpPr>
-          <p:cNvPr id="6" name="Connector 5"/>
-          <p:cNvCxnSpPr/>
-          <p:nvPr/>
-        </p:nvCxnSpPr>
-        <p:spPr>
-          <a:xfrm>
-            <a:off x="381744" y="459216"/>
-            <a:ext cx="85536" cy="71280"/>
-          </a:xfrm>
-          <a:prstGeom prst="line">
-            <a:avLst/>
-          </a:prstGeom>
-          <a:ln w="11880">
-            <a:solidFill>
-              <a:srgbClr val="526B45"/>
-            </a:solidFill>
-          </a:ln>
-        </p:spPr>
-      </p:cxnSp>
-      <p:cxnSp>
-        <p:nvCxnSpPr>
-          <p:cNvPr id="7" name="Connector 6"/>
-          <p:cNvCxnSpPr/>
-          <p:nvPr/>
-        </p:nvCxnSpPr>
-        <p:spPr>
-          <a:xfrm>
-            <a:off x="410256" y="459216"/>
-            <a:ext cx="80784" cy="61776"/>
-          </a:xfrm>
-          <a:prstGeom prst="line">
-            <a:avLst/>
-          </a:prstGeom>
-          <a:ln w="11880">
-            <a:solidFill>
-              <a:srgbClr val="526B45"/>
-            </a:solidFill>
-          </a:ln>
-        </p:spPr>
-      </p:cxnSp>
-      <p:sp>
-        <p:nvSpPr>
-          <p:cNvPr id="8" name="텍스트"/>
-          <p:cNvSpPr txBox="1"/>
-          <p:nvPr/>
-        </p:nvSpPr>
-        <p:spPr>
-          <a:xfrm>
-            <a:off x="216000" y="972000"/>
-            <a:ext cx="1728000" cy="122400"/>
+            <a:off x="252000" y="468000"/>
+            <a:ext cx="2520000" cy="360000"/>
           </a:xfrm>
           <a:prstGeom prst="rect">
             <a:avLst/>
@@ -3346,32 +3161,32 @@
           <a:p>
             <a:pPr algn="l">
               <a:lnSpc>
-                <a:spcPts val="1232"/>
+                <a:spcPts val="3190"/>
               </a:lnSpc>
             </a:pPr>
             <a:r>
-              <a:rPr sz="850" b="1">
+              <a:rPr sz="2200" b="1">
                 <a:solidFill>
-                  <a:srgbClr val="A1C291"/>
+                  <a:srgbClr val="12151C"/>
                 </a:solidFill>
                 <a:latin typeface="맑은 고딕"/>
                 <a:ea typeface="맑은 고딕"/>
               </a:rPr>
-              <a:t>로스터</a:t>
-            </a:r>
-          </a:p>
-        </p:txBody>
-      </p:sp>
-      <p:sp>
-        <p:nvSpPr>
-          <p:cNvPr id="9" name="텍스트"/>
+              <a:t>송현우</a:t>
+            </a:r>
+          </a:p>
+        </p:txBody>
+      </p:sp>
+      <p:sp>
+        <p:nvSpPr>
+          <p:cNvPr id="4" name="텍스트"/>
           <p:cNvSpPr txBox="1"/>
           <p:nvPr/>
         </p:nvSpPr>
         <p:spPr>
           <a:xfrm>
-            <a:off x="216000" y="1123200"/>
-            <a:ext cx="1728000" cy="346712"/>
+            <a:off x="252000" y="871200"/>
+            <a:ext cx="2520000" cy="171451"/>
           </a:xfrm>
           <a:prstGeom prst="rect">
             <a:avLst/>
@@ -3386,32 +3201,32 @@
           <a:p>
             <a:pPr algn="l">
               <a:lnSpc>
-                <a:spcPts val="3045"/>
+                <a:spcPts val="1305"/>
               </a:lnSpc>
             </a:pPr>
             <a:r>
-              <a:rPr sz="2100" b="1" spc="50">
+              <a:rPr sz="900" b="0">
                 <a:solidFill>
-                  <a:srgbClr val="FFFFFF"/>
+                  <a:srgbClr val="46303E"/>
                 </a:solidFill>
-                <a:latin typeface="바탕"/>
-                <a:ea typeface="바탕"/>
+                <a:latin typeface="맑은 고딕"/>
+                <a:ea typeface="맑은 고딕"/>
               </a:rPr>
-              <a:t>송현우</a:t>
-            </a:r>
-          </a:p>
-        </p:txBody>
-      </p:sp>
-      <p:sp>
-        <p:nvSpPr>
-          <p:cNvPr id="10" name="텍스트"/>
+              <a:t>로스터</a:t>
+            </a:r>
+          </a:p>
+        </p:txBody>
+      </p:sp>
+      <p:sp>
+        <p:nvSpPr>
+          <p:cNvPr id="5" name="텍스트"/>
           <p:cNvSpPr txBox="1"/>
           <p:nvPr/>
         </p:nvSpPr>
         <p:spPr>
           <a:xfrm>
-            <a:off x="2073600" y="540000"/>
-            <a:ext cx="122400" cy="168911"/>
+            <a:off x="252000" y="1216800"/>
+            <a:ext cx="2520000" cy="129541"/>
           </a:xfrm>
           <a:prstGeom prst="rect">
             <a:avLst/>
@@ -3426,32 +3241,61 @@
           <a:p>
             <a:pPr algn="l">
               <a:lnSpc>
-                <a:spcPts val="1015"/>
+                <a:spcPts val="986"/>
               </a:lnSpc>
             </a:pPr>
             <a:r>
-              <a:rPr sz="700" b="1">
+              <a:rPr sz="680" b="0">
                 <a:solidFill>
-                  <a:srgbClr val="A1C291"/>
+                  <a:srgbClr val="46303E"/>
                 </a:solidFill>
                 <a:latin typeface="맑은 고딕"/>
                 <a:ea typeface="맑은 고딕"/>
               </a:rPr>
-              <a:t>T</a:t>
-            </a:r>
-          </a:p>
-        </p:txBody>
-      </p:sp>
-      <p:sp>
-        <p:nvSpPr>
-          <p:cNvPr id="11" name="텍스트"/>
+              <a:t>주소를 입력해 주세요</a:t>
+            </a:r>
+          </a:p>
+        </p:txBody>
+      </p:sp>
+      <p:sp>
+        <p:nvSpPr>
+          <p:cNvPr id="6" name="Rectangle 5"/>
+          <p:cNvSpPr/>
+          <p:nvPr/>
+        </p:nvSpPr>
+        <p:spPr>
+          <a:xfrm>
+            <a:off x="0" y="1476000"/>
+            <a:ext cx="3240000" cy="324000"/>
+          </a:xfrm>
+          <a:prstGeom prst="rect">
+            <a:avLst/>
+          </a:prstGeom>
+          <a:solidFill>
+            <a:srgbClr val="FFA5C6"/>
+          </a:solidFill>
+          <a:ln>
+            <a:noFill/>
+          </a:ln>
+        </p:spPr>
+        <p:txBody>
+          <a:bodyPr rtlCol="0" anchor="ctr"/>
+          <a:lstStyle/>
+          <a:p>
+            <a:pPr algn="ctr"/>
+          </a:p>
+        </p:txBody>
+      </p:sp>
+      <p:sp>
+        <p:nvSpPr>
+          <p:cNvPr id="7" name="텍스트"/>
           <p:cNvSpPr txBox="1"/>
           <p:nvPr/>
         </p:nvSpPr>
         <p:spPr>
           <a:xfrm>
-            <a:off x="2217600" y="540000"/>
-            <a:ext cx="900000" cy="168911"/>
+            <a:off x="252000" y="1569600"/>
+            <a:ext cx="1296000" cy="133351"/>
           </a:xfrm>
           <a:prstGeom prst="rect">
             <a:avLst/>
@@ -3470,9 +3314,9 @@
               </a:lnSpc>
             </a:pPr>
             <a:r>
-              <a:rPr sz="700" b="0">
+              <a:rPr sz="700" b="1">
                 <a:solidFill>
-                  <a:srgbClr val="FFFFFF"/>
+                  <a:srgbClr val="12151C"/>
                 </a:solidFill>
                 <a:latin typeface="맑은 고딕"/>
                 <a:ea typeface="맑은 고딕"/>
@@ -3484,14 +3328,14 @@
       </p:sp>
       <p:sp>
         <p:nvSpPr>
-          <p:cNvPr id="12" name="텍스트"/>
+          <p:cNvPr id="8" name="텍스트"/>
           <p:cNvSpPr txBox="1"/>
           <p:nvPr/>
         </p:nvSpPr>
         <p:spPr>
           <a:xfrm>
-            <a:off x="2073600" y="708911"/>
-            <a:ext cx="122400" cy="168911"/>
+            <a:off x="1656000" y="1569600"/>
+            <a:ext cx="1368000" cy="133351"/>
           </a:xfrm>
           <a:prstGeom prst="rect">
             <a:avLst/>
@@ -3512,132 +3356,12 @@
             <a:r>
               <a:rPr sz="700" b="1">
                 <a:solidFill>
-                  <a:srgbClr val="A1C291"/>
-                </a:solidFill>
-                <a:latin typeface="맑은 고딕"/>
-                <a:ea typeface="맑은 고딕"/>
-              </a:rPr>
-              <a:t>E</a:t>
-            </a:r>
-          </a:p>
-        </p:txBody>
-      </p:sp>
-      <p:sp>
-        <p:nvSpPr>
-          <p:cNvPr id="13" name="텍스트"/>
-          <p:cNvSpPr txBox="1"/>
-          <p:nvPr/>
-        </p:nvSpPr>
-        <p:spPr>
-          <a:xfrm>
-            <a:off x="2217600" y="708911"/>
-            <a:ext cx="900000" cy="168911"/>
-          </a:xfrm>
-          <a:prstGeom prst="rect">
-            <a:avLst/>
-          </a:prstGeom>
-          <a:noFill/>
-        </p:spPr>
-        <p:txBody>
-          <a:bodyPr wrap="square" lIns="0" rIns="0" tIns="0" bIns="0" anchor="t">
-            <a:spAutoFit/>
-          </a:bodyPr>
-          <a:lstStyle/>
-          <a:p>
-            <a:pPr algn="l">
-              <a:lnSpc>
-                <a:spcPts val="1015"/>
-              </a:lnSpc>
-            </a:pPr>
-            <a:r>
-              <a:rPr sz="700" b="0">
-                <a:solidFill>
-                  <a:srgbClr val="FFFFFF"/>
+                  <a:srgbClr val="12151C"/>
                 </a:solidFill>
                 <a:latin typeface="맑은 고딕"/>
                 <a:ea typeface="맑은 고딕"/>
               </a:rPr>
               <a:t>name@example.com</a:t>
-            </a:r>
-          </a:p>
-        </p:txBody>
-      </p:sp>
-      <p:sp>
-        <p:nvSpPr>
-          <p:cNvPr id="14" name="텍스트"/>
-          <p:cNvSpPr txBox="1"/>
-          <p:nvPr/>
-        </p:nvSpPr>
-        <p:spPr>
-          <a:xfrm>
-            <a:off x="2073600" y="877822"/>
-            <a:ext cx="122400" cy="168911"/>
-          </a:xfrm>
-          <a:prstGeom prst="rect">
-            <a:avLst/>
-          </a:prstGeom>
-          <a:noFill/>
-        </p:spPr>
-        <p:txBody>
-          <a:bodyPr wrap="square" lIns="0" rIns="0" tIns="0" bIns="0" anchor="t">
-            <a:spAutoFit/>
-          </a:bodyPr>
-          <a:lstStyle/>
-          <a:p>
-            <a:pPr algn="l">
-              <a:lnSpc>
-                <a:spcPts val="1015"/>
-              </a:lnSpc>
-            </a:pPr>
-            <a:r>
-              <a:rPr sz="700" b="1">
-                <a:solidFill>
-                  <a:srgbClr val="A1C291"/>
-                </a:solidFill>
-                <a:latin typeface="맑은 고딕"/>
-                <a:ea typeface="맑은 고딕"/>
-              </a:rPr>
-              <a:t>A</a:t>
-            </a:r>
-          </a:p>
-        </p:txBody>
-      </p:sp>
-      <p:sp>
-        <p:nvSpPr>
-          <p:cNvPr id="15" name="텍스트"/>
-          <p:cNvSpPr txBox="1"/>
-          <p:nvPr/>
-        </p:nvSpPr>
-        <p:spPr>
-          <a:xfrm>
-            <a:off x="2217600" y="877822"/>
-            <a:ext cx="900000" cy="168911"/>
-          </a:xfrm>
-          <a:prstGeom prst="rect">
-            <a:avLst/>
-          </a:prstGeom>
-          <a:noFill/>
-        </p:spPr>
-        <p:txBody>
-          <a:bodyPr wrap="square" lIns="0" rIns="0" tIns="0" bIns="0" anchor="t">
-            <a:spAutoFit/>
-          </a:bodyPr>
-          <a:lstStyle/>
-          <a:p>
-            <a:pPr algn="l">
-              <a:lnSpc>
-                <a:spcPts val="1015"/>
-              </a:lnSpc>
-            </a:pPr>
-            <a:r>
-              <a:rPr sz="700" b="0">
-                <a:solidFill>
-                  <a:srgbClr val="FFFFFF"/>
-                </a:solidFill>
-                <a:latin typeface="맑은 고딕"/>
-                <a:ea typeface="맑은 고딕"/>
-              </a:rPr>
-              <a:t>주소를 입력해 주세요</a:t>
             </a:r>
           </a:p>
         </p:txBody>
@@ -3656,7 +3380,7 @@
     <p:bg>
       <p:bgPr>
         <a:solidFill>
-          <a:srgbClr val="F3F9F1"/>
+          <a:srgbClr val="FFFFFF"/>
         </a:solidFill>
         <a:effectLst/>
       </p:bgPr>
@@ -3677,13 +3401,13 @@
         <p:spPr>
           <a:xfrm>
             <a:off x="0" y="0"/>
-            <a:ext cx="64800" cy="1800000"/>
+            <a:ext cx="3240000" cy="1800000"/>
           </a:xfrm>
           <a:prstGeom prst="rect">
             <a:avLst/>
           </a:prstGeom>
           <a:solidFill>
-            <a:srgbClr val="5D9640"/>
+            <a:srgbClr val="FF8FB8"/>
           </a:solidFill>
           <a:ln>
             <a:noFill/>
@@ -3699,193 +3423,14 @@
       </p:sp>
       <p:sp>
         <p:nvSpPr>
-          <p:cNvPr id="3" name="텍스트"/>
-          <p:cNvSpPr txBox="1"/>
+          <p:cNvPr id="3" name="Freeform 2"/>
+          <p:cNvSpPr/>
           <p:nvPr/>
         </p:nvSpPr>
         <p:spPr>
           <a:xfrm>
-            <a:off x="252000" y="432000"/>
-            <a:ext cx="2016000" cy="252000"/>
-          </a:xfrm>
-          <a:prstGeom prst="rect">
-            <a:avLst/>
-          </a:prstGeom>
-          <a:noFill/>
-        </p:spPr>
-        <p:txBody>
-          <a:bodyPr wrap="square" lIns="0" rIns="0" tIns="0" bIns="0" anchor="t">
-            <a:spAutoFit/>
-          </a:bodyPr>
-          <a:lstStyle/>
-          <a:p>
-            <a:pPr algn="l">
-              <a:lnSpc>
-                <a:spcPts val="2465"/>
-              </a:lnSpc>
-            </a:pPr>
-            <a:r>
-              <a:rPr sz="1700" b="1">
-                <a:solidFill>
-                  <a:srgbClr val="314F22"/>
-                </a:solidFill>
-                <a:latin typeface="바탕"/>
-                <a:ea typeface="바탕"/>
-              </a:rPr>
-              <a:t>상호명</a:t>
-            </a:r>
-          </a:p>
-        </p:txBody>
-      </p:sp>
-      <p:sp>
-        <p:nvSpPr>
-          <p:cNvPr id="4" name="텍스트"/>
-          <p:cNvSpPr txBox="1"/>
-          <p:nvPr/>
-        </p:nvSpPr>
-        <p:spPr>
-          <a:xfrm>
-            <a:off x="252000" y="878400"/>
-            <a:ext cx="2016000" cy="540000"/>
-          </a:xfrm>
-          <a:prstGeom prst="rect">
-            <a:avLst/>
-          </a:prstGeom>
-          <a:noFill/>
-        </p:spPr>
-        <p:txBody>
-          <a:bodyPr wrap="square" lIns="0" rIns="0" tIns="0" bIns="0" anchor="t">
-            <a:spAutoFit/>
-          </a:bodyPr>
-          <a:lstStyle/>
-          <a:p>
-            <a:pPr algn="l">
-              <a:lnSpc>
-                <a:spcPts val="1232"/>
-              </a:lnSpc>
-            </a:pPr>
-            <a:r>
-              <a:rPr sz="850" b="0">
-                <a:solidFill>
-                  <a:srgbClr val="63755A"/>
-                </a:solidFill>
-                <a:latin typeface="바탕"/>
-                <a:ea typeface="바탕"/>
-              </a:rPr>
-              <a:t>함께 먹으면 더 맛있는 시간</a:t>
-            </a:r>
-          </a:p>
-        </p:txBody>
-      </p:sp>
-      <p:sp>
-        <p:nvSpPr>
-          <p:cNvPr id="5" name="Rectangle 4"/>
-          <p:cNvSpPr/>
-          <p:nvPr/>
-        </p:nvSpPr>
-        <p:spPr>
-          <a:xfrm>
-            <a:off x="2520000" y="1080000"/>
-            <a:ext cx="504000" cy="504000"/>
-          </a:xfrm>
-          <a:prstGeom prst="rect">
-            <a:avLst/>
-          </a:prstGeom>
-          <a:noFill/>
-          <a:ln w="9000">
-            <a:solidFill>
-              <a:srgbClr val="5D9640"/>
-            </a:solidFill>
-            <a:prstDash val="dash"/>
-          </a:ln>
-        </p:spPr>
-        <p:txBody>
-          <a:bodyPr rtlCol="0" anchor="ctr"/>
-          <a:lstStyle/>
-          <a:p>
-            <a:pPr algn="ctr"/>
-          </a:p>
-        </p:txBody>
-      </p:sp>
-      <p:sp>
-        <p:nvSpPr>
-          <p:cNvPr id="6" name="텍스트"/>
-          <p:cNvSpPr txBox="1"/>
-          <p:nvPr/>
-        </p:nvSpPr>
-        <p:spPr>
-          <a:xfrm>
-            <a:off x="2520000" y="1080000"/>
-            <a:ext cx="504000" cy="504000"/>
-          </a:xfrm>
-          <a:prstGeom prst="rect">
-            <a:avLst/>
-          </a:prstGeom>
-          <a:noFill/>
-        </p:spPr>
-        <p:txBody>
-          <a:bodyPr wrap="square" lIns="0" rIns="0" tIns="0" bIns="0" anchor="ctr">
-            <a:spAutoFit/>
-          </a:bodyPr>
-          <a:lstStyle/>
-          <a:p>
-            <a:pPr algn="ctr">
-              <a:lnSpc>
-                <a:spcPts val="1305"/>
-              </a:lnSpc>
-            </a:pPr>
-            <a:r>
-              <a:rPr sz="900" b="1">
-                <a:solidFill>
-                  <a:srgbClr val="63755A"/>
-                </a:solidFill>
-                <a:latin typeface="맑은 고딕"/>
-                <a:ea typeface="맑은 고딕"/>
-              </a:rPr>
-              <a:t>QR</a:t>
-            </a:r>
-          </a:p>
-        </p:txBody>
-      </p:sp>
-      <p:sp>
-        <p:nvSpPr>
-          <p:cNvPr id="7" name="Rectangle 6"/>
-          <p:cNvSpPr/>
-          <p:nvPr/>
-        </p:nvSpPr>
-        <p:spPr>
-          <a:xfrm>
-            <a:off x="252000" y="763200"/>
-            <a:ext cx="201600" cy="14400"/>
-          </a:xfrm>
-          <a:prstGeom prst="rect">
-            <a:avLst/>
-          </a:prstGeom>
-          <a:solidFill>
-            <a:srgbClr val="5D9640"/>
-          </a:solidFill>
-          <a:ln>
-            <a:noFill/>
-          </a:ln>
-        </p:spPr>
-        <p:txBody>
-          <a:bodyPr rtlCol="0" anchor="ctr"/>
-          <a:lstStyle/>
-          <a:p>
-            <a:pPr algn="ctr"/>
-          </a:p>
-        </p:txBody>
-      </p:sp>
-      <p:sp>
-        <p:nvSpPr>
-          <p:cNvPr id="8" name="Freeform 7"/>
-          <p:cNvSpPr/>
-          <p:nvPr/>
-        </p:nvSpPr>
-        <p:spPr>
-          <a:xfrm>
-            <a:off x="2642400" y="432000"/>
-            <a:ext cx="259200" cy="110160"/>
+            <a:off x="2412000" y="972000"/>
+            <a:ext cx="828000" cy="828000"/>
           </a:xfrm>
           <a:custGeom>
             <a:avLst/>
@@ -3894,58 +3439,91 @@
             <a:cxnLst/>
             <a:rect l="l" t="t" r="r" b="b"/>
             <a:pathLst>
-              <a:path w="259200" h="110160">
+              <a:path w="828000" h="828000">
                 <a:moveTo>
-                  <a:pt x="259200" y="0"/>
+                  <a:pt x="828000" y="828000"/>
                 </a:moveTo>
                 <a:lnTo>
-                  <a:pt x="255951" y="24513"/>
+                  <a:pt x="0" y="828000"/>
                 </a:lnTo>
                 <a:lnTo>
-                  <a:pt x="246366" y="47797"/>
+                  <a:pt x="1773" y="773846"/>
                 </a:lnTo>
                 <a:lnTo>
-                  <a:pt x="230925" y="68684"/>
+                  <a:pt x="7084" y="719924"/>
                 </a:lnTo>
                 <a:lnTo>
-                  <a:pt x="210404" y="86127"/>
+                  <a:pt x="15910" y="666465"/>
                 </a:lnTo>
                 <a:lnTo>
-                  <a:pt x="185831" y="99251"/>
+                  <a:pt x="28213" y="613698"/>
                 </a:lnTo>
                 <a:lnTo>
-                  <a:pt x="158439" y="107398"/>
+                  <a:pt x="43942" y="561848"/>
                 </a:lnTo>
                 <a:lnTo>
-                  <a:pt x="129600" y="110160"/>
+                  <a:pt x="63028" y="511138"/>
                 </a:lnTo>
                 <a:lnTo>
-                  <a:pt x="100761" y="107398"/>
+                  <a:pt x="85389" y="461785"/>
                 </a:lnTo>
                 <a:lnTo>
-                  <a:pt x="73369" y="99251"/>
+                  <a:pt x="110931" y="414000"/>
                 </a:lnTo>
                 <a:lnTo>
-                  <a:pt x="48796" y="86127"/>
+                  <a:pt x="139543" y="367988"/>
                 </a:lnTo>
                 <a:lnTo>
-                  <a:pt x="28275" y="68684"/>
+                  <a:pt x="171103" y="323946"/>
                 </a:lnTo>
                 <a:lnTo>
-                  <a:pt x="12834" y="47797"/>
+                  <a:pt x="205477" y="282062"/>
                 </a:lnTo>
                 <a:lnTo>
-                  <a:pt x="3249" y="24513"/>
+                  <a:pt x="242516" y="242516"/>
                 </a:lnTo>
                 <a:lnTo>
-                  <a:pt x="0" y="0"/>
+                  <a:pt x="282062" y="205477"/>
+                </a:lnTo>
+                <a:lnTo>
+                  <a:pt x="323946" y="171103"/>
+                </a:lnTo>
+                <a:lnTo>
+                  <a:pt x="367988" y="139543"/>
+                </a:lnTo>
+                <a:lnTo>
+                  <a:pt x="414000" y="110931"/>
+                </a:lnTo>
+                <a:lnTo>
+                  <a:pt x="461785" y="85389"/>
+                </a:lnTo>
+                <a:lnTo>
+                  <a:pt x="511138" y="63028"/>
+                </a:lnTo>
+                <a:lnTo>
+                  <a:pt x="561848" y="43942"/>
+                </a:lnTo>
+                <a:lnTo>
+                  <a:pt x="613698" y="28213"/>
+                </a:lnTo>
+                <a:lnTo>
+                  <a:pt x="666465" y="15910"/>
+                </a:lnTo>
+                <a:lnTo>
+                  <a:pt x="719924" y="7084"/>
+                </a:lnTo>
+                <a:lnTo>
+                  <a:pt x="773846" y="1773"/>
+                </a:lnTo>
+                <a:lnTo>
+                  <a:pt x="828000" y="0"/>
                 </a:lnTo>
                 <a:close/>
               </a:path>
             </a:pathLst>
           </a:custGeom>
           <a:solidFill>
-            <a:srgbClr val="5D9640"/>
+            <a:srgbClr val="FFA8C8"/>
           </a:solidFill>
           <a:ln>
             <a:noFill/>
@@ -3961,77 +3539,84 @@
       </p:sp>
       <p:sp>
         <p:nvSpPr>
-          <p:cNvPr id="9" name="Rounded Rectangle 8"/>
-          <p:cNvSpPr/>
+          <p:cNvPr id="4" name="텍스트"/>
+          <p:cNvSpPr txBox="1"/>
           <p:nvPr/>
         </p:nvSpPr>
         <p:spPr>
           <a:xfrm>
-            <a:off x="2687760" y="538920"/>
-            <a:ext cx="168480" cy="22680"/>
+            <a:off x="252000" y="432000"/>
+            <a:ext cx="2304000" cy="720000"/>
           </a:xfrm>
-          <a:prstGeom prst="roundRect">
-            <a:avLst>
-              <a:gd name="adj" fmla="val 42857"/>
-            </a:avLst>
+          <a:prstGeom prst="rect">
+            <a:avLst/>
           </a:prstGeom>
-          <a:solidFill>
-            <a:srgbClr val="E6F3E0"/>
-          </a:solidFill>
-          <a:ln>
-            <a:noFill/>
-          </a:ln>
+          <a:noFill/>
         </p:spPr>
         <p:txBody>
-          <a:bodyPr rtlCol="0" anchor="ctr"/>
-          <a:lstStyle/>
-          <a:p>
-            <a:pPr algn="ctr"/>
-          </a:p>
-        </p:txBody>
-      </p:sp>
-      <p:cxnSp>
-        <p:nvCxnSpPr>
-          <p:cNvPr id="10" name="Connector 9"/>
-          <p:cNvCxnSpPr/>
+          <a:bodyPr wrap="square" lIns="0" rIns="0" tIns="0" bIns="0" anchor="t">
+            <a:spAutoFit/>
+          </a:bodyPr>
+          <a:lstStyle/>
+          <a:p>
+            <a:pPr algn="l">
+              <a:lnSpc>
+                <a:spcPts val="1884"/>
+              </a:lnSpc>
+            </a:pPr>
+            <a:r>
+              <a:rPr sz="1300" b="1">
+                <a:solidFill>
+                  <a:srgbClr val="12151C"/>
+                </a:solidFill>
+                <a:latin typeface="맑은 고딕"/>
+                <a:ea typeface="맑은 고딕"/>
+              </a:rPr>
+              <a:t>함께 먹으면 더 맛있는 시간</a:t>
+            </a:r>
+          </a:p>
+        </p:txBody>
+      </p:sp>
+      <p:sp>
+        <p:nvSpPr>
+          <p:cNvPr id="5" name="텍스트"/>
+          <p:cNvSpPr txBox="1"/>
           <p:nvPr/>
-        </p:nvCxnSpPr>
+        </p:nvSpPr>
         <p:spPr>
           <a:xfrm>
-            <a:off x="2752560" y="321840"/>
-            <a:ext cx="116640" cy="97200"/>
+            <a:off x="252000" y="1476000"/>
+            <a:ext cx="1800000" cy="133351"/>
           </a:xfrm>
-          <a:prstGeom prst="line">
+          <a:prstGeom prst="rect">
             <a:avLst/>
           </a:prstGeom>
-          <a:ln w="16200">
-            <a:solidFill>
-              <a:srgbClr val="E6F3E0"/>
-            </a:solidFill>
-          </a:ln>
+          <a:noFill/>
         </p:spPr>
-      </p:cxnSp>
-      <p:cxnSp>
-        <p:nvCxnSpPr>
-          <p:cNvPr id="11" name="Connector 10"/>
-          <p:cNvCxnSpPr/>
-          <p:nvPr/>
-        </p:nvCxnSpPr>
-        <p:spPr>
-          <a:xfrm>
-            <a:off x="2791440" y="321840"/>
-            <a:ext cx="110160" cy="84240"/>
-          </a:xfrm>
-          <a:prstGeom prst="line">
-            <a:avLst/>
-          </a:prstGeom>
-          <a:ln w="16200">
-            <a:solidFill>
-              <a:srgbClr val="E6F3E0"/>
-            </a:solidFill>
-          </a:ln>
-        </p:spPr>
-      </p:cxnSp>
+        <p:txBody>
+          <a:bodyPr wrap="square" lIns="0" rIns="0" tIns="0" bIns="0" anchor="t">
+            <a:spAutoFit/>
+          </a:bodyPr>
+          <a:lstStyle/>
+          <a:p>
+            <a:pPr algn="l">
+              <a:lnSpc>
+                <a:spcPts val="1015"/>
+              </a:lnSpc>
+            </a:pPr>
+            <a:r>
+              <a:rPr sz="700" b="1" spc="200">
+                <a:solidFill>
+                  <a:srgbClr val="12151C"/>
+                </a:solidFill>
+                <a:latin typeface="맑은 고딕"/>
+                <a:ea typeface="맑은 고딕"/>
+              </a:rPr>
+              <a:t>상호명</a:t>
+            </a:r>
+          </a:p>
+        </p:txBody>
+      </p:sp>
     </p:spTree>
   </p:cSld>
   <p:clrMapOvr>

--- a/public/fun/cards/food/food-18.pptx
+++ b/public/fun/cards/food/food-18.pptx
@@ -3105,8 +3105,8 @@
         </p:nvSpPr>
         <p:spPr>
           <a:xfrm>
-            <a:off x="252000" y="223200"/>
-            <a:ext cx="2016000" cy="133351"/>
+            <a:off x="252000" y="252000"/>
+            <a:ext cx="1512000" cy="123826"/>
           </a:xfrm>
           <a:prstGeom prst="rect">
             <a:avLst/>
@@ -3121,11 +3121,11 @@
           <a:p>
             <a:pPr algn="l">
               <a:lnSpc>
-                <a:spcPts val="1015"/>
+                <a:spcPts val="942"/>
               </a:lnSpc>
             </a:pPr>
             <a:r>
-              <a:rPr sz="700" b="1" spc="200">
+              <a:rPr sz="650" b="1" spc="220">
                 <a:solidFill>
                   <a:srgbClr val="46303E"/>
                 </a:solidFill>
@@ -3137,16 +3137,37 @@
           </a:p>
         </p:txBody>
       </p:sp>
-      <p:sp>
-        <p:nvSpPr>
-          <p:cNvPr id="3" name="텍스트"/>
+      <p:cxnSp>
+        <p:nvCxnSpPr>
+          <p:cNvPr id="3" name="Connector 2"/>
+          <p:cNvCxnSpPr/>
+          <p:nvPr/>
+        </p:nvCxnSpPr>
+        <p:spPr>
+          <a:xfrm>
+            <a:off x="252000" y="388800"/>
+            <a:ext cx="2736000" cy="0"/>
+          </a:xfrm>
+          <a:prstGeom prst="line">
+            <a:avLst/>
+          </a:prstGeom>
+          <a:ln w="3600">
+            <a:solidFill>
+              <a:srgbClr val="A05E7A"/>
+            </a:solidFill>
+          </a:ln>
+        </p:spPr>
+      </p:cxnSp>
+      <p:sp>
+        <p:nvSpPr>
+          <p:cNvPr id="4" name="텍스트"/>
           <p:cNvSpPr txBox="1"/>
           <p:nvPr/>
         </p:nvSpPr>
         <p:spPr>
           <a:xfrm>
-            <a:off x="252000" y="468000"/>
-            <a:ext cx="2520000" cy="360000"/>
+            <a:off x="252000" y="576000"/>
+            <a:ext cx="1800000" cy="237600"/>
           </a:xfrm>
           <a:prstGeom prst="rect">
             <a:avLst/>
@@ -3161,11 +3182,11 @@
           <a:p>
             <a:pPr algn="l">
               <a:lnSpc>
-                <a:spcPts val="3190"/>
+                <a:spcPts val="1957"/>
               </a:lnSpc>
             </a:pPr>
             <a:r>
-              <a:rPr sz="2200" b="1">
+              <a:rPr sz="1350" b="1" spc="120">
                 <a:solidFill>
                   <a:srgbClr val="12151C"/>
                 </a:solidFill>
@@ -3179,14 +3200,14 @@
       </p:sp>
       <p:sp>
         <p:nvSpPr>
-          <p:cNvPr id="4" name="텍스트"/>
+          <p:cNvPr id="5" name="텍스트"/>
           <p:cNvSpPr txBox="1"/>
           <p:nvPr/>
         </p:nvSpPr>
         <p:spPr>
           <a:xfrm>
-            <a:off x="252000" y="871200"/>
-            <a:ext cx="2520000" cy="171451"/>
+            <a:off x="252000" y="828000"/>
+            <a:ext cx="1800000" cy="133351"/>
           </a:xfrm>
           <a:prstGeom prst="rect">
             <a:avLst/>
@@ -3201,11 +3222,11 @@
           <a:p>
             <a:pPr algn="l">
               <a:lnSpc>
-                <a:spcPts val="1305"/>
+                <a:spcPts val="1015"/>
               </a:lnSpc>
             </a:pPr>
             <a:r>
-              <a:rPr sz="900" b="0">
+              <a:rPr sz="700" b="0" spc="60">
                 <a:solidFill>
                   <a:srgbClr val="46303E"/>
                 </a:solidFill>
@@ -3219,14 +3240,14 @@
       </p:sp>
       <p:sp>
         <p:nvSpPr>
-          <p:cNvPr id="5" name="텍스트"/>
+          <p:cNvPr id="6" name="텍스트"/>
           <p:cNvSpPr txBox="1"/>
           <p:nvPr/>
         </p:nvSpPr>
         <p:spPr>
           <a:xfrm>
-            <a:off x="252000" y="1216800"/>
-            <a:ext cx="2520000" cy="129541"/>
+            <a:off x="252000" y="1036800"/>
+            <a:ext cx="2520000" cy="123826"/>
           </a:xfrm>
           <a:prstGeom prst="rect">
             <a:avLst/>
@@ -3241,11 +3262,11 @@
           <a:p>
             <a:pPr algn="l">
               <a:lnSpc>
-                <a:spcPts val="986"/>
+                <a:spcPts val="942"/>
               </a:lnSpc>
             </a:pPr>
             <a:r>
-              <a:rPr sz="680" b="0">
+              <a:rPr sz="650" b="0">
                 <a:solidFill>
                   <a:srgbClr val="46303E"/>
                 </a:solidFill>
@@ -3259,14 +3280,14 @@
       </p:sp>
       <p:sp>
         <p:nvSpPr>
-          <p:cNvPr id="6" name="Rectangle 5"/>
+          <p:cNvPr id="7" name="Rectangle 6"/>
           <p:cNvSpPr/>
           <p:nvPr/>
         </p:nvSpPr>
         <p:spPr>
           <a:xfrm>
-            <a:off x="0" y="1476000"/>
-            <a:ext cx="3240000" cy="324000"/>
+            <a:off x="0" y="1339200"/>
+            <a:ext cx="3240000" cy="460800"/>
           </a:xfrm>
           <a:prstGeom prst="rect">
             <a:avLst/>
@@ -3288,14 +3309,14 @@
       </p:sp>
       <p:sp>
         <p:nvSpPr>
-          <p:cNvPr id="7" name="텍스트"/>
+          <p:cNvPr id="8" name="텍스트"/>
           <p:cNvSpPr txBox="1"/>
           <p:nvPr/>
         </p:nvSpPr>
         <p:spPr>
           <a:xfrm>
-            <a:off x="252000" y="1569600"/>
-            <a:ext cx="1296000" cy="133351"/>
+            <a:off x="252000" y="1476000"/>
+            <a:ext cx="936000" cy="91441"/>
           </a:xfrm>
           <a:prstGeom prst="rect">
             <a:avLst/>
@@ -3310,11 +3331,53 @@
           <a:p>
             <a:pPr algn="l">
               <a:lnSpc>
-                <a:spcPts val="1015"/>
+                <a:spcPts val="696"/>
               </a:lnSpc>
             </a:pPr>
             <a:r>
-              <a:rPr sz="700" b="1">
+              <a:rPr sz="480" b="1" spc="140">
+                <a:solidFill>
+                  <a:srgbClr val="12151C">
+                    <a:alpha val="70000"/>
+                  </a:srgbClr>
+                </a:solidFill>
+                <a:latin typeface="맑은 고딕"/>
+                <a:ea typeface="맑은 고딕"/>
+              </a:rPr>
+              <a:t>TEL</a:t>
+            </a:r>
+          </a:p>
+        </p:txBody>
+      </p:sp>
+      <p:sp>
+        <p:nvSpPr>
+          <p:cNvPr id="9" name="텍스트"/>
+          <p:cNvSpPr txBox="1"/>
+          <p:nvPr/>
+        </p:nvSpPr>
+        <p:spPr>
+          <a:xfrm>
+            <a:off x="252000" y="1576800"/>
+            <a:ext cx="936000" cy="123826"/>
+          </a:xfrm>
+          <a:prstGeom prst="rect">
+            <a:avLst/>
+          </a:prstGeom>
+          <a:noFill/>
+        </p:spPr>
+        <p:txBody>
+          <a:bodyPr wrap="square" lIns="0" rIns="0" tIns="0" bIns="0" anchor="t">
+            <a:spAutoFit/>
+          </a:bodyPr>
+          <a:lstStyle/>
+          <a:p>
+            <a:pPr algn="l">
+              <a:lnSpc>
+                <a:spcPts val="942"/>
+              </a:lnSpc>
+            </a:pPr>
+            <a:r>
+              <a:rPr sz="650" b="1">
                 <a:solidFill>
                   <a:srgbClr val="12151C"/>
                 </a:solidFill>
@@ -3328,14 +3391,14 @@
       </p:sp>
       <p:sp>
         <p:nvSpPr>
-          <p:cNvPr id="8" name="텍스트"/>
+          <p:cNvPr id="10" name="텍스트"/>
           <p:cNvSpPr txBox="1"/>
           <p:nvPr/>
         </p:nvSpPr>
         <p:spPr>
           <a:xfrm>
-            <a:off x="1656000" y="1569600"/>
-            <a:ext cx="1368000" cy="133351"/>
+            <a:off x="1188000" y="1476000"/>
+            <a:ext cx="1080000" cy="91441"/>
           </a:xfrm>
           <a:prstGeom prst="rect">
             <a:avLst/>
@@ -3350,11 +3413,53 @@
           <a:p>
             <a:pPr algn="l">
               <a:lnSpc>
-                <a:spcPts val="1015"/>
+                <a:spcPts val="696"/>
               </a:lnSpc>
             </a:pPr>
             <a:r>
-              <a:rPr sz="700" b="1">
+              <a:rPr sz="480" b="1" spc="140">
+                <a:solidFill>
+                  <a:srgbClr val="12151C">
+                    <a:alpha val="70000"/>
+                  </a:srgbClr>
+                </a:solidFill>
+                <a:latin typeface="맑은 고딕"/>
+                <a:ea typeface="맑은 고딕"/>
+              </a:rPr>
+              <a:t>MAIL</a:t>
+            </a:r>
+          </a:p>
+        </p:txBody>
+      </p:sp>
+      <p:sp>
+        <p:nvSpPr>
+          <p:cNvPr id="11" name="텍스트"/>
+          <p:cNvSpPr txBox="1"/>
+          <p:nvPr/>
+        </p:nvSpPr>
+        <p:spPr>
+          <a:xfrm>
+            <a:off x="1188000" y="1576800"/>
+            <a:ext cx="1080000" cy="123826"/>
+          </a:xfrm>
+          <a:prstGeom prst="rect">
+            <a:avLst/>
+          </a:prstGeom>
+          <a:noFill/>
+        </p:spPr>
+        <p:txBody>
+          <a:bodyPr wrap="square" lIns="0" rIns="0" tIns="0" bIns="0" anchor="t">
+            <a:spAutoFit/>
+          </a:bodyPr>
+          <a:lstStyle/>
+          <a:p>
+            <a:pPr algn="l">
+              <a:lnSpc>
+                <a:spcPts val="942"/>
+              </a:lnSpc>
+            </a:pPr>
+            <a:r>
+              <a:rPr sz="650" b="1">
                 <a:solidFill>
                   <a:srgbClr val="12151C"/>
                 </a:solidFill>
@@ -3366,6 +3471,27 @@
           </a:p>
         </p:txBody>
       </p:sp>
+      <p:cxnSp>
+        <p:nvCxnSpPr>
+          <p:cNvPr id="12" name="Connector 11"/>
+          <p:cNvCxnSpPr/>
+          <p:nvPr/>
+        </p:nvCxnSpPr>
+        <p:spPr>
+          <a:xfrm>
+            <a:off x="1108800" y="1468800"/>
+            <a:ext cx="0" cy="208800"/>
+          </a:xfrm>
+          <a:prstGeom prst="line">
+            <a:avLst/>
+          </a:prstGeom>
+          <a:ln w="3600">
+            <a:solidFill>
+              <a:srgbClr val="12151C"/>
+            </a:solidFill>
+          </a:ln>
+        </p:spPr>
+      </p:cxnSp>
     </p:spTree>
   </p:cSld>
   <p:clrMapOvr>
@@ -3394,14 +3520,54 @@
       <p:grpSpPr/>
       <p:sp>
         <p:nvSpPr>
-          <p:cNvPr id="2" name="Rectangle 1"/>
+          <p:cNvPr id="2" name="텍스트"/>
+          <p:cNvSpPr txBox="1"/>
+          <p:nvPr/>
+        </p:nvSpPr>
+        <p:spPr>
+          <a:xfrm>
+            <a:off x="252000" y="252000"/>
+            <a:ext cx="1080000" cy="99061"/>
+          </a:xfrm>
+          <a:prstGeom prst="rect">
+            <a:avLst/>
+          </a:prstGeom>
+          <a:noFill/>
+        </p:spPr>
+        <p:txBody>
+          <a:bodyPr wrap="square" lIns="0" rIns="0" tIns="0" bIns="0" anchor="t">
+            <a:spAutoFit/>
+          </a:bodyPr>
+          <a:lstStyle/>
+          <a:p>
+            <a:pPr algn="l">
+              <a:lnSpc>
+                <a:spcPts val="754"/>
+              </a:lnSpc>
+            </a:pPr>
+            <a:r>
+              <a:rPr sz="520" b="1" spc="240">
+                <a:solidFill>
+                  <a:srgbClr val="6B7280"/>
+                </a:solidFill>
+                <a:latin typeface="맑은 고딕"/>
+                <a:ea typeface="맑은 고딕"/>
+              </a:rPr>
+              <a:t>대표 메뉴</a:t>
+            </a:r>
+          </a:p>
+        </p:txBody>
+      </p:sp>
+      <p:sp>
+        <p:nvSpPr>
+          <p:cNvPr id="3" name="Rectangle 2"/>
           <p:cNvSpPr/>
           <p:nvPr/>
         </p:nvSpPr>
         <p:spPr>
           <a:xfrm>
-            <a:off x="0" y="0"/>
-            <a:ext cx="3240000" cy="1800000"/>
+            <a:off x="252000" y="352800"/>
+            <a:ext cx="108000" cy="14400"/>
           </a:xfrm>
           <a:prstGeom prst="rect">
             <a:avLst/>
@@ -3421,132 +3587,37 @@
           </a:p>
         </p:txBody>
       </p:sp>
-      <p:sp>
-        <p:nvSpPr>
-          <p:cNvPr id="3" name="Freeform 2"/>
-          <p:cNvSpPr/>
+      <p:cxnSp>
+        <p:nvCxnSpPr>
+          <p:cNvPr id="4" name="Connector 3"/>
+          <p:cNvCxnSpPr/>
           <p:nvPr/>
-        </p:nvSpPr>
-        <p:spPr>
-          <a:xfrm>
-            <a:off x="2412000" y="972000"/>
-            <a:ext cx="828000" cy="828000"/>
-          </a:xfrm>
-          <a:custGeom>
+        </p:nvCxnSpPr>
+        <p:spPr>
+          <a:xfrm>
+            <a:off x="252000" y="453600"/>
+            <a:ext cx="1512000" cy="0"/>
+          </a:xfrm>
+          <a:prstGeom prst="line">
             <a:avLst/>
-            <a:gdLst/>
-            <a:ahLst/>
-            <a:cxnLst/>
-            <a:rect l="l" t="t" r="r" b="b"/>
-            <a:pathLst>
-              <a:path w="828000" h="828000">
-                <a:moveTo>
-                  <a:pt x="828000" y="828000"/>
-                </a:moveTo>
-                <a:lnTo>
-                  <a:pt x="0" y="828000"/>
-                </a:lnTo>
-                <a:lnTo>
-                  <a:pt x="1773" y="773846"/>
-                </a:lnTo>
-                <a:lnTo>
-                  <a:pt x="7084" y="719924"/>
-                </a:lnTo>
-                <a:lnTo>
-                  <a:pt x="15910" y="666465"/>
-                </a:lnTo>
-                <a:lnTo>
-                  <a:pt x="28213" y="613698"/>
-                </a:lnTo>
-                <a:lnTo>
-                  <a:pt x="43942" y="561848"/>
-                </a:lnTo>
-                <a:lnTo>
-                  <a:pt x="63028" y="511138"/>
-                </a:lnTo>
-                <a:lnTo>
-                  <a:pt x="85389" y="461785"/>
-                </a:lnTo>
-                <a:lnTo>
-                  <a:pt x="110931" y="414000"/>
-                </a:lnTo>
-                <a:lnTo>
-                  <a:pt x="139543" y="367988"/>
-                </a:lnTo>
-                <a:lnTo>
-                  <a:pt x="171103" y="323946"/>
-                </a:lnTo>
-                <a:lnTo>
-                  <a:pt x="205477" y="282062"/>
-                </a:lnTo>
-                <a:lnTo>
-                  <a:pt x="242516" y="242516"/>
-                </a:lnTo>
-                <a:lnTo>
-                  <a:pt x="282062" y="205477"/>
-                </a:lnTo>
-                <a:lnTo>
-                  <a:pt x="323946" y="171103"/>
-                </a:lnTo>
-                <a:lnTo>
-                  <a:pt x="367988" y="139543"/>
-                </a:lnTo>
-                <a:lnTo>
-                  <a:pt x="414000" y="110931"/>
-                </a:lnTo>
-                <a:lnTo>
-                  <a:pt x="461785" y="85389"/>
-                </a:lnTo>
-                <a:lnTo>
-                  <a:pt x="511138" y="63028"/>
-                </a:lnTo>
-                <a:lnTo>
-                  <a:pt x="561848" y="43942"/>
-                </a:lnTo>
-                <a:lnTo>
-                  <a:pt x="613698" y="28213"/>
-                </a:lnTo>
-                <a:lnTo>
-                  <a:pt x="666465" y="15910"/>
-                </a:lnTo>
-                <a:lnTo>
-                  <a:pt x="719924" y="7084"/>
-                </a:lnTo>
-                <a:lnTo>
-                  <a:pt x="773846" y="1773"/>
-                </a:lnTo>
-                <a:lnTo>
-                  <a:pt x="828000" y="0"/>
-                </a:lnTo>
-                <a:close/>
-              </a:path>
-            </a:pathLst>
-          </a:custGeom>
-          <a:solidFill>
-            <a:srgbClr val="FFA8C8"/>
-          </a:solidFill>
-          <a:ln>
-            <a:noFill/>
+          </a:prstGeom>
+          <a:ln w="3600">
+            <a:solidFill>
+              <a:srgbClr val="E3E5E9"/>
+            </a:solidFill>
           </a:ln>
         </p:spPr>
-        <p:txBody>
-          <a:bodyPr rtlCol="0" anchor="ctr"/>
-          <a:lstStyle/>
-          <a:p>
-            <a:pPr algn="ctr"/>
-          </a:p>
-        </p:txBody>
-      </p:sp>
-      <p:sp>
-        <p:nvSpPr>
-          <p:cNvPr id="4" name="텍스트"/>
+      </p:cxnSp>
+      <p:sp>
+        <p:nvSpPr>
+          <p:cNvPr id="5" name="텍스트"/>
           <p:cNvSpPr txBox="1"/>
           <p:nvPr/>
         </p:nvSpPr>
         <p:spPr>
           <a:xfrm>
-            <a:off x="252000" y="432000"/>
-            <a:ext cx="2304000" cy="720000"/>
+            <a:off x="252000" y="507600"/>
+            <a:ext cx="216000" cy="95251"/>
           </a:xfrm>
           <a:prstGeom prst="rect">
             <a:avLst/>
@@ -3561,32 +3632,133 @@
           <a:p>
             <a:pPr algn="l">
               <a:lnSpc>
-                <a:spcPts val="1884"/>
+                <a:spcPts val="725"/>
               </a:lnSpc>
             </a:pPr>
             <a:r>
-              <a:rPr sz="1300" b="1">
+              <a:rPr sz="500" b="1" spc="100">
+                <a:solidFill>
+                  <a:srgbClr val="6B7280"/>
+                </a:solidFill>
+                <a:latin typeface="맑은 고딕"/>
+                <a:ea typeface="맑은 고딕"/>
+              </a:rPr>
+              <a:t>01</a:t>
+            </a:r>
+          </a:p>
+        </p:txBody>
+      </p:sp>
+      <p:sp>
+        <p:nvSpPr>
+          <p:cNvPr id="6" name="텍스트"/>
+          <p:cNvSpPr txBox="1"/>
+          <p:nvPr/>
+        </p:nvSpPr>
+        <p:spPr>
+          <a:xfrm>
+            <a:off x="489600" y="496800"/>
+            <a:ext cx="1260000" cy="133351"/>
+          </a:xfrm>
+          <a:prstGeom prst="rect">
+            <a:avLst/>
+          </a:prstGeom>
+          <a:noFill/>
+        </p:spPr>
+        <p:txBody>
+          <a:bodyPr wrap="square" lIns="0" rIns="0" tIns="0" bIns="0" anchor="t">
+            <a:spAutoFit/>
+          </a:bodyPr>
+          <a:lstStyle/>
+          <a:p>
+            <a:pPr algn="l">
+              <a:lnSpc>
+                <a:spcPts val="1015"/>
+              </a:lnSpc>
+            </a:pPr>
+            <a:r>
+              <a:rPr sz="700" b="0">
                 <a:solidFill>
                   <a:srgbClr val="12151C"/>
                 </a:solidFill>
                 <a:latin typeface="맑은 고딕"/>
                 <a:ea typeface="맑은 고딕"/>
               </a:rPr>
-              <a:t>함께 먹으면 더 맛있는 시간</a:t>
-            </a:r>
-          </a:p>
-        </p:txBody>
-      </p:sp>
-      <p:sp>
-        <p:nvSpPr>
-          <p:cNvPr id="5" name="텍스트"/>
+              <a:t>핸드드립</a:t>
+            </a:r>
+          </a:p>
+        </p:txBody>
+      </p:sp>
+      <p:cxnSp>
+        <p:nvCxnSpPr>
+          <p:cNvPr id="7" name="Connector 6"/>
+          <p:cNvCxnSpPr/>
+          <p:nvPr/>
+        </p:nvCxnSpPr>
+        <p:spPr>
+          <a:xfrm>
+            <a:off x="252000" y="640800"/>
+            <a:ext cx="1512000" cy="0"/>
+          </a:xfrm>
+          <a:prstGeom prst="line">
+            <a:avLst/>
+          </a:prstGeom>
+          <a:ln w="3600">
+            <a:solidFill>
+              <a:srgbClr val="E3E5E9"/>
+            </a:solidFill>
+          </a:ln>
+        </p:spPr>
+      </p:cxnSp>
+      <p:sp>
+        <p:nvSpPr>
+          <p:cNvPr id="8" name="텍스트"/>
           <p:cNvSpPr txBox="1"/>
           <p:nvPr/>
         </p:nvSpPr>
         <p:spPr>
           <a:xfrm>
-            <a:off x="252000" y="1476000"/>
-            <a:ext cx="1800000" cy="133351"/>
+            <a:off x="252000" y="694800"/>
+            <a:ext cx="216000" cy="95251"/>
+          </a:xfrm>
+          <a:prstGeom prst="rect">
+            <a:avLst/>
+          </a:prstGeom>
+          <a:noFill/>
+        </p:spPr>
+        <p:txBody>
+          <a:bodyPr wrap="square" lIns="0" rIns="0" tIns="0" bIns="0" anchor="t">
+            <a:spAutoFit/>
+          </a:bodyPr>
+          <a:lstStyle/>
+          <a:p>
+            <a:pPr algn="l">
+              <a:lnSpc>
+                <a:spcPts val="725"/>
+              </a:lnSpc>
+            </a:pPr>
+            <a:r>
+              <a:rPr sz="500" b="1" spc="100">
+                <a:solidFill>
+                  <a:srgbClr val="6B7280"/>
+                </a:solidFill>
+                <a:latin typeface="맑은 고딕"/>
+                <a:ea typeface="맑은 고딕"/>
+              </a:rPr>
+              <a:t>02</a:t>
+            </a:r>
+          </a:p>
+        </p:txBody>
+      </p:sp>
+      <p:sp>
+        <p:nvSpPr>
+          <p:cNvPr id="9" name="텍스트"/>
+          <p:cNvSpPr txBox="1"/>
+          <p:nvPr/>
+        </p:nvSpPr>
+        <p:spPr>
+          <a:xfrm>
+            <a:off x="489600" y="684000"/>
+            <a:ext cx="1260000" cy="133351"/>
           </a:xfrm>
           <a:prstGeom prst="rect">
             <a:avLst/>
@@ -3605,7 +3777,383 @@
               </a:lnSpc>
             </a:pPr>
             <a:r>
-              <a:rPr sz="700" b="1" spc="200">
+              <a:rPr sz="700" b="0">
+                <a:solidFill>
+                  <a:srgbClr val="12151C"/>
+                </a:solidFill>
+                <a:latin typeface="맑은 고딕"/>
+                <a:ea typeface="맑은 고딕"/>
+              </a:rPr>
+              <a:t>수제 디저트</a:t>
+            </a:r>
+          </a:p>
+        </p:txBody>
+      </p:sp>
+      <p:cxnSp>
+        <p:nvCxnSpPr>
+          <p:cNvPr id="10" name="Connector 9"/>
+          <p:cNvCxnSpPr/>
+          <p:nvPr/>
+        </p:nvCxnSpPr>
+        <p:spPr>
+          <a:xfrm>
+            <a:off x="252000" y="828000"/>
+            <a:ext cx="1512000" cy="0"/>
+          </a:xfrm>
+          <a:prstGeom prst="line">
+            <a:avLst/>
+          </a:prstGeom>
+          <a:ln w="3600">
+            <a:solidFill>
+              <a:srgbClr val="E3E5E9"/>
+            </a:solidFill>
+          </a:ln>
+        </p:spPr>
+      </p:cxnSp>
+      <p:sp>
+        <p:nvSpPr>
+          <p:cNvPr id="11" name="텍스트"/>
+          <p:cNvSpPr txBox="1"/>
+          <p:nvPr/>
+        </p:nvSpPr>
+        <p:spPr>
+          <a:xfrm>
+            <a:off x="252000" y="882000"/>
+            <a:ext cx="216000" cy="95251"/>
+          </a:xfrm>
+          <a:prstGeom prst="rect">
+            <a:avLst/>
+          </a:prstGeom>
+          <a:noFill/>
+        </p:spPr>
+        <p:txBody>
+          <a:bodyPr wrap="square" lIns="0" rIns="0" tIns="0" bIns="0" anchor="t">
+            <a:spAutoFit/>
+          </a:bodyPr>
+          <a:lstStyle/>
+          <a:p>
+            <a:pPr algn="l">
+              <a:lnSpc>
+                <a:spcPts val="725"/>
+              </a:lnSpc>
+            </a:pPr>
+            <a:r>
+              <a:rPr sz="500" b="1" spc="100">
+                <a:solidFill>
+                  <a:srgbClr val="6B7280"/>
+                </a:solidFill>
+                <a:latin typeface="맑은 고딕"/>
+                <a:ea typeface="맑은 고딕"/>
+              </a:rPr>
+              <a:t>03</a:t>
+            </a:r>
+          </a:p>
+        </p:txBody>
+      </p:sp>
+      <p:sp>
+        <p:nvSpPr>
+          <p:cNvPr id="12" name="텍스트"/>
+          <p:cNvSpPr txBox="1"/>
+          <p:nvPr/>
+        </p:nvSpPr>
+        <p:spPr>
+          <a:xfrm>
+            <a:off x="489600" y="871200"/>
+            <a:ext cx="1260000" cy="133351"/>
+          </a:xfrm>
+          <a:prstGeom prst="rect">
+            <a:avLst/>
+          </a:prstGeom>
+          <a:noFill/>
+        </p:spPr>
+        <p:txBody>
+          <a:bodyPr wrap="square" lIns="0" rIns="0" tIns="0" bIns="0" anchor="t">
+            <a:spAutoFit/>
+          </a:bodyPr>
+          <a:lstStyle/>
+          <a:p>
+            <a:pPr algn="l">
+              <a:lnSpc>
+                <a:spcPts val="1015"/>
+              </a:lnSpc>
+            </a:pPr>
+            <a:r>
+              <a:rPr sz="700" b="0">
+                <a:solidFill>
+                  <a:srgbClr val="12151C"/>
+                </a:solidFill>
+                <a:latin typeface="맑은 고딕"/>
+                <a:ea typeface="맑은 고딕"/>
+              </a:rPr>
+              <a:t>샐러드</a:t>
+            </a:r>
+          </a:p>
+        </p:txBody>
+      </p:sp>
+      <p:cxnSp>
+        <p:nvCxnSpPr>
+          <p:cNvPr id="13" name="Connector 12"/>
+          <p:cNvCxnSpPr/>
+          <p:nvPr/>
+        </p:nvCxnSpPr>
+        <p:spPr>
+          <a:xfrm>
+            <a:off x="252000" y="1015200"/>
+            <a:ext cx="1512000" cy="0"/>
+          </a:xfrm>
+          <a:prstGeom prst="line">
+            <a:avLst/>
+          </a:prstGeom>
+          <a:ln w="3600">
+            <a:solidFill>
+              <a:srgbClr val="E3E5E9"/>
+            </a:solidFill>
+          </a:ln>
+        </p:spPr>
+      </p:cxnSp>
+      <p:sp>
+        <p:nvSpPr>
+          <p:cNvPr id="14" name="Rectangle 13"/>
+          <p:cNvSpPr/>
+          <p:nvPr/>
+        </p:nvSpPr>
+        <p:spPr>
+          <a:xfrm>
+            <a:off x="2088000" y="252000"/>
+            <a:ext cx="900000" cy="1296000"/>
+          </a:xfrm>
+          <a:prstGeom prst="rect">
+            <a:avLst/>
+          </a:prstGeom>
+          <a:solidFill>
+            <a:srgbClr val="FF8FB8"/>
+          </a:solidFill>
+          <a:ln>
+            <a:noFill/>
+          </a:ln>
+        </p:spPr>
+        <p:txBody>
+          <a:bodyPr rtlCol="0" anchor="ctr"/>
+          <a:lstStyle/>
+          <a:p>
+            <a:pPr algn="ctr"/>
+          </a:p>
+        </p:txBody>
+      </p:sp>
+      <p:sp>
+        <p:nvSpPr>
+          <p:cNvPr id="15" name="텍스트"/>
+          <p:cNvSpPr txBox="1"/>
+          <p:nvPr/>
+        </p:nvSpPr>
+        <p:spPr>
+          <a:xfrm>
+            <a:off x="2196000" y="360000"/>
+            <a:ext cx="684000" cy="95251"/>
+          </a:xfrm>
+          <a:prstGeom prst="rect">
+            <a:avLst/>
+          </a:prstGeom>
+          <a:noFill/>
+        </p:spPr>
+        <p:txBody>
+          <a:bodyPr wrap="square" lIns="0" rIns="0" tIns="0" bIns="0" anchor="t">
+            <a:spAutoFit/>
+          </a:bodyPr>
+          <a:lstStyle/>
+          <a:p>
+            <a:pPr algn="l">
+              <a:lnSpc>
+                <a:spcPts val="725"/>
+              </a:lnSpc>
+            </a:pPr>
+            <a:r>
+              <a:rPr sz="500" b="1" spc="240">
+                <a:solidFill>
+                  <a:srgbClr val="12151C">
+                    <a:alpha val="75000"/>
+                  </a:srgbClr>
+                </a:solidFill>
+                <a:latin typeface="맑은 고딕"/>
+                <a:ea typeface="맑은 고딕"/>
+              </a:rPr>
+              <a:t>INFO</a:t>
+            </a:r>
+          </a:p>
+        </p:txBody>
+      </p:sp>
+      <p:sp>
+        <p:nvSpPr>
+          <p:cNvPr id="16" name="텍스트"/>
+          <p:cNvSpPr txBox="1"/>
+          <p:nvPr/>
+        </p:nvSpPr>
+        <p:spPr>
+          <a:xfrm>
+            <a:off x="2196000" y="504000"/>
+            <a:ext cx="684000" cy="121921"/>
+          </a:xfrm>
+          <a:prstGeom prst="rect">
+            <a:avLst/>
+          </a:prstGeom>
+          <a:noFill/>
+        </p:spPr>
+        <p:txBody>
+          <a:bodyPr wrap="square" lIns="0" rIns="0" tIns="0" bIns="0" anchor="t">
+            <a:spAutoFit/>
+          </a:bodyPr>
+          <a:lstStyle/>
+          <a:p>
+            <a:pPr algn="l">
+              <a:lnSpc>
+                <a:spcPts val="927"/>
+              </a:lnSpc>
+            </a:pPr>
+            <a:r>
+              <a:rPr sz="640" b="1">
+                <a:solidFill>
+                  <a:srgbClr val="12151C"/>
+                </a:solidFill>
+                <a:latin typeface="맑은 고딕"/>
+                <a:ea typeface="맑은 고딕"/>
+              </a:rPr>
+              <a:t>매일 08:00 – 20:00</a:t>
+            </a:r>
+          </a:p>
+        </p:txBody>
+      </p:sp>
+      <p:cxnSp>
+        <p:nvCxnSpPr>
+          <p:cNvPr id="17" name="Connector 16"/>
+          <p:cNvCxnSpPr/>
+          <p:nvPr/>
+        </p:nvCxnSpPr>
+        <p:spPr>
+          <a:xfrm>
+            <a:off x="2196000" y="770400"/>
+            <a:ext cx="684000" cy="0"/>
+          </a:xfrm>
+          <a:prstGeom prst="line">
+            <a:avLst/>
+          </a:prstGeom>
+          <a:ln w="3600">
+            <a:solidFill>
+              <a:srgbClr val="12151C"/>
+            </a:solidFill>
+          </a:ln>
+        </p:spPr>
+      </p:cxnSp>
+      <p:sp>
+        <p:nvSpPr>
+          <p:cNvPr id="18" name="텍스트"/>
+          <p:cNvSpPr txBox="1"/>
+          <p:nvPr/>
+        </p:nvSpPr>
+        <p:spPr>
+          <a:xfrm>
+            <a:off x="2196000" y="849600"/>
+            <a:ext cx="684000" cy="91441"/>
+          </a:xfrm>
+          <a:prstGeom prst="rect">
+            <a:avLst/>
+          </a:prstGeom>
+          <a:noFill/>
+        </p:spPr>
+        <p:txBody>
+          <a:bodyPr wrap="square" lIns="0" rIns="0" tIns="0" bIns="0" anchor="t">
+            <a:spAutoFit/>
+          </a:bodyPr>
+          <a:lstStyle/>
+          <a:p>
+            <a:pPr algn="l">
+              <a:lnSpc>
+                <a:spcPts val="696"/>
+              </a:lnSpc>
+            </a:pPr>
+            <a:r>
+              <a:rPr sz="480" b="1" spc="140">
+                <a:solidFill>
+                  <a:srgbClr val="12151C">
+                    <a:alpha val="75000"/>
+                  </a:srgbClr>
+                </a:solidFill>
+                <a:latin typeface="맑은 고딕"/>
+                <a:ea typeface="맑은 고딕"/>
+              </a:rPr>
+              <a:t>KAKAO</a:t>
+            </a:r>
+          </a:p>
+        </p:txBody>
+      </p:sp>
+      <p:sp>
+        <p:nvSpPr>
+          <p:cNvPr id="19" name="텍스트"/>
+          <p:cNvSpPr txBox="1"/>
+          <p:nvPr/>
+        </p:nvSpPr>
+        <p:spPr>
+          <a:xfrm>
+            <a:off x="2196000" y="957600"/>
+            <a:ext cx="684000" cy="121921"/>
+          </a:xfrm>
+          <a:prstGeom prst="rect">
+            <a:avLst/>
+          </a:prstGeom>
+          <a:noFill/>
+        </p:spPr>
+        <p:txBody>
+          <a:bodyPr wrap="square" lIns="0" rIns="0" tIns="0" bIns="0" anchor="t">
+            <a:spAutoFit/>
+          </a:bodyPr>
+          <a:lstStyle/>
+          <a:p>
+            <a:pPr algn="l">
+              <a:lnSpc>
+                <a:spcPts val="927"/>
+              </a:lnSpc>
+            </a:pPr>
+            <a:r>
+              <a:rPr sz="640" b="1">
+                <a:solidFill>
+                  <a:srgbClr val="12151C"/>
+                </a:solidFill>
+                <a:latin typeface="맑은 고딕"/>
+                <a:ea typeface="맑은 고딕"/>
+              </a:rPr>
+              <a:t>@채널아이디</a:t>
+            </a:r>
+          </a:p>
+        </p:txBody>
+      </p:sp>
+      <p:sp>
+        <p:nvSpPr>
+          <p:cNvPr id="20" name="텍스트"/>
+          <p:cNvSpPr txBox="1"/>
+          <p:nvPr/>
+        </p:nvSpPr>
+        <p:spPr>
+          <a:xfrm>
+            <a:off x="2196000" y="1368000"/>
+            <a:ext cx="720000" cy="106681"/>
+          </a:xfrm>
+          <a:prstGeom prst="rect">
+            <a:avLst/>
+          </a:prstGeom>
+          <a:noFill/>
+        </p:spPr>
+        <p:txBody>
+          <a:bodyPr wrap="square" lIns="0" rIns="0" tIns="0" bIns="0" anchor="t">
+            <a:spAutoFit/>
+          </a:bodyPr>
+          <a:lstStyle/>
+          <a:p>
+            <a:pPr algn="l">
+              <a:lnSpc>
+                <a:spcPts val="811"/>
+              </a:lnSpc>
+            </a:pPr>
+            <a:r>
+              <a:rPr sz="560" b="1" spc="80">
                 <a:solidFill>
                   <a:srgbClr val="12151C"/>
                 </a:solidFill>
